--- a/ppts_output_v3/18_文化事业建设费风险指引.pptx
+++ b/ppts_output_v3/18_文化事业建设费风险指引.pptx
@@ -3296,7 +3296,7 @@
           <a:p>
             <a:pPr algn="l">
               <a:lnSpc>
-                <a:spcPts val="1820"/>
+                <a:spcPts val="2080"/>
               </a:lnSpc>
               <a:spcBef>
                 <a:spcPts val="0"/>
@@ -3306,7 +3306,7 @@
               </a:spcAft>
             </a:pPr>
             <a:r>
-              <a:rPr sz="1400" b="1">
+              <a:rPr sz="1600" b="1">
                 <a:solidFill>
                   <a:srgbClr val="1B3A5C"/>
                 </a:solidFill>
@@ -3318,7 +3318,7 @@
           <a:p>
             <a:pPr algn="l">
               <a:lnSpc>
-                <a:spcPts val="1820"/>
+                <a:spcPts val="2080"/>
               </a:lnSpc>
               <a:spcBef>
                 <a:spcPts val="800"/>
@@ -3328,7 +3328,7 @@
               </a:spcAft>
             </a:pPr>
             <a:r>
-              <a:rPr sz="1400" b="1">
+              <a:rPr sz="1600" b="1">
                 <a:solidFill>
                   <a:srgbClr val="333333"/>
                 </a:solidFill>
@@ -3340,7 +3340,7 @@
           <a:p>
             <a:pPr algn="l">
               <a:lnSpc>
-                <a:spcPts val="1430"/>
+                <a:spcPts val="1820"/>
               </a:lnSpc>
               <a:spcBef>
                 <a:spcPts val="200"/>
@@ -3350,7 +3350,7 @@
               </a:spcAft>
             </a:pPr>
             <a:r>
-              <a:rPr sz="1100" b="0">
+              <a:rPr sz="1400" b="0">
                 <a:solidFill>
                   <a:srgbClr val="000000"/>
                 </a:solidFill>
@@ -3362,7 +3362,7 @@
           <a:p>
             <a:pPr algn="l">
               <a:lnSpc>
-                <a:spcPts val="1820"/>
+                <a:spcPts val="2080"/>
               </a:lnSpc>
               <a:spcBef>
                 <a:spcPts val="800"/>
@@ -3372,7 +3372,7 @@
               </a:spcAft>
             </a:pPr>
             <a:r>
-              <a:rPr sz="1400" b="1">
+              <a:rPr sz="1600" b="1">
                 <a:solidFill>
                   <a:srgbClr val="1B5C9E"/>
                 </a:solidFill>
@@ -3384,7 +3384,7 @@
           <a:p>
             <a:pPr algn="l">
               <a:lnSpc>
-                <a:spcPts val="1430"/>
+                <a:spcPts val="1820"/>
               </a:lnSpc>
               <a:spcBef>
                 <a:spcPts val="200"/>
@@ -3394,7 +3394,7 @@
               </a:spcAft>
             </a:pPr>
             <a:r>
-              <a:rPr sz="1100" b="0">
+              <a:rPr sz="1400" b="0">
                 <a:solidFill>
                   <a:srgbClr val="000000"/>
                 </a:solidFill>
@@ -3406,7 +3406,7 @@
           <a:p>
             <a:pPr algn="l">
               <a:lnSpc>
-                <a:spcPts val="1430"/>
+                <a:spcPts val="1820"/>
               </a:lnSpc>
               <a:spcBef>
                 <a:spcPts val="200"/>
@@ -3416,7 +3416,7 @@
               </a:spcAft>
             </a:pPr>
             <a:r>
-              <a:rPr sz="1100" b="0">
+              <a:rPr sz="1400" b="0">
                 <a:solidFill>
                   <a:srgbClr val="000000"/>
                 </a:solidFill>
@@ -3428,7 +3428,7 @@
           <a:p>
             <a:pPr algn="l">
               <a:lnSpc>
-                <a:spcPts val="1820"/>
+                <a:spcPts val="2080"/>
               </a:lnSpc>
               <a:spcBef>
                 <a:spcPts val="800"/>
@@ -3438,7 +3438,7 @@
               </a:spcAft>
             </a:pPr>
             <a:r>
-              <a:rPr sz="1400" b="1">
+              <a:rPr sz="1600" b="1">
                 <a:solidFill>
                   <a:srgbClr val="CC3333"/>
                 </a:solidFill>
@@ -3450,7 +3450,7 @@
           <a:p>
             <a:pPr algn="l">
               <a:lnSpc>
-                <a:spcPts val="1430"/>
+                <a:spcPts val="1820"/>
               </a:lnSpc>
               <a:spcBef>
                 <a:spcPts val="200"/>
@@ -3460,7 +3460,7 @@
               </a:spcAft>
             </a:pPr>
             <a:r>
-              <a:rPr sz="1100" b="0">
+              <a:rPr sz="1400" b="0">
                 <a:solidFill>
                   <a:srgbClr val="000000"/>
                 </a:solidFill>
@@ -3472,7 +3472,7 @@
           <a:p>
             <a:pPr algn="l">
               <a:lnSpc>
-                <a:spcPts val="1820"/>
+                <a:spcPts val="2080"/>
               </a:lnSpc>
               <a:spcBef>
                 <a:spcPts val="800"/>
@@ -3482,7 +3482,7 @@
               </a:spcAft>
             </a:pPr>
             <a:r>
-              <a:rPr sz="1400" b="1">
+              <a:rPr sz="1600" b="1">
                 <a:solidFill>
                   <a:srgbClr val="008040"/>
                 </a:solidFill>
@@ -3494,7 +3494,7 @@
           <a:p>
             <a:pPr algn="l">
               <a:lnSpc>
-                <a:spcPts val="1430"/>
+                <a:spcPts val="1820"/>
               </a:lnSpc>
               <a:spcBef>
                 <a:spcPts val="200"/>
@@ -3504,7 +3504,7 @@
               </a:spcAft>
             </a:pPr>
             <a:r>
-              <a:rPr sz="1100" b="0">
+              <a:rPr sz="1400" b="0">
                 <a:solidFill>
                   <a:srgbClr val="000000"/>
                 </a:solidFill>
@@ -3516,7 +3516,7 @@
           <a:p>
             <a:pPr algn="l">
               <a:lnSpc>
-                <a:spcPts val="1430"/>
+                <a:spcPts val="1820"/>
               </a:lnSpc>
               <a:spcBef>
                 <a:spcPts val="200"/>
@@ -3526,7 +3526,7 @@
               </a:spcAft>
             </a:pPr>
             <a:r>
-              <a:rPr sz="1100" b="0">
+              <a:rPr sz="1400" b="0">
                 <a:solidFill>
                   <a:srgbClr val="000000"/>
                 </a:solidFill>

--- a/ppts_output_v3/18_文化事业建设费风险指引.pptx
+++ b/ppts_output_v3/18_文化事业建设费风险指引.pptx
@@ -3511,28 +3511,6 @@
                 <a:latin typeface="Microsoft YaHei"/>
               </a:rPr>
               <a:t>企业核查开具广告服务业发票时，是否同时缴纳了文化事业建设费。</a:t>
-            </a:r>
-          </a:p>
-          <a:p>
-            <a:pPr algn="l">
-              <a:lnSpc>
-                <a:spcPts val="1820"/>
-              </a:lnSpc>
-              <a:spcBef>
-                <a:spcPts val="200"/>
-              </a:spcBef>
-              <a:spcAft>
-                <a:spcPts val="200"/>
-              </a:spcAft>
-            </a:pPr>
-            <a:r>
-              <a:rPr sz="1400" b="0">
-                <a:solidFill>
-                  <a:srgbClr val="000000"/>
-                </a:solidFill>
-                <a:latin typeface="Microsoft YaHei"/>
-              </a:rPr>
-              <a:t>340</a:t>
             </a:r>
           </a:p>
         </p:txBody>

--- a/ppts_output_v3/18_文化事业建设费风险指引.pptx
+++ b/ppts_output_v3/18_文化事业建设费风险指引.pptx
@@ -3422,7 +3422,7 @@
                 </a:solidFill>
                 <a:latin typeface="Microsoft YaHei"/>
               </a:rPr>
-              <a:t>在中华人民共和国境内提供广告服务的广告媒介单位和户外广告经营单位，应按照本通知规定缴纳文化事业建设费。本通知所称广告服务，是指《财政部国家税务总局关于全面推开营业税改征增值税试点的通知》（财税〔2016〕36 号）的《销售服务、无形资产、不动产注释》中“广告服务”范围内的服务。广告服务，是指利用图书、报纸、杂志、广播、电视、电影、幻灯、路牌、招贴、橱窗、霓虹灯、灯箱、互联网等各种形式为客户的商品、经营服务项目、文体节目或者通告、声明等委托事项进行宣传和提供相关服务的业务活动。包括广告代理和广告的发布、播映、宣传、展示等。</a:t>
+              <a:t>在中华人民共和国境内提供广告服务的广告媒介单位和户外广告经营单位，应按照本通知规定缴纳文化事业建设费。本通知所称广告服务，是指《财政部国家税务总局关于全面推开营业税改征增值税试点的通知》（财税〔2016〕36号）的《销售服务、无形资产、不动产注释》中“广告服务”范围内的服务。广告服务，是指利用图书、报纸、杂志、广播、电视、电影、幻灯、路牌、招贴、橱窗、霓虹灯、灯箱、互联网等各种形式为客户的商品、经营服务项目、文体节目或者通告、声明等委托事项进行宣传和提供相关服务的业务活动。包括广告代理和广告的发布、播映、宣传、展示等。</a:t>
             </a:r>
           </a:p>
           <a:p>

--- a/ppts_output_v3/18_文化事业建设费风险指引.pptx
+++ b/ppts_output_v3/18_文化事业建设费风险指引.pptx
@@ -3292,11 +3292,10 @@
             <a:spAutoFit/>
           </a:bodyPr>
           <a:lstStyle/>
-          <a:p/>
           <a:p>
             <a:pPr algn="l">
               <a:lnSpc>
-                <a:spcPts val="2080"/>
+                <a:spcPct val="125000"/>
               </a:lnSpc>
               <a:spcBef>
                 <a:spcPts val="0"/>
@@ -3318,7 +3317,7 @@
           <a:p>
             <a:pPr algn="l">
               <a:lnSpc>
-                <a:spcPts val="2080"/>
+                <a:spcPct val="125000"/>
               </a:lnSpc>
               <a:spcBef>
                 <a:spcPts val="800"/>
@@ -3340,7 +3339,7 @@
           <a:p>
             <a:pPr algn="l">
               <a:lnSpc>
-                <a:spcPts val="1820"/>
+                <a:spcPct val="125000"/>
               </a:lnSpc>
               <a:spcBef>
                 <a:spcPts val="200"/>
@@ -3362,7 +3361,7 @@
           <a:p>
             <a:pPr algn="l">
               <a:lnSpc>
-                <a:spcPts val="2080"/>
+                <a:spcPct val="125000"/>
               </a:lnSpc>
               <a:spcBef>
                 <a:spcPts val="800"/>
@@ -3384,7 +3383,7 @@
           <a:p>
             <a:pPr algn="l">
               <a:lnSpc>
-                <a:spcPts val="1820"/>
+                <a:spcPct val="125000"/>
               </a:lnSpc>
               <a:spcBef>
                 <a:spcPts val="200"/>
@@ -3406,7 +3405,7 @@
           <a:p>
             <a:pPr algn="l">
               <a:lnSpc>
-                <a:spcPts val="1820"/>
+                <a:spcPct val="125000"/>
               </a:lnSpc>
               <a:spcBef>
                 <a:spcPts val="200"/>
@@ -3428,7 +3427,7 @@
           <a:p>
             <a:pPr algn="l">
               <a:lnSpc>
-                <a:spcPts val="2080"/>
+                <a:spcPct val="125000"/>
               </a:lnSpc>
               <a:spcBef>
                 <a:spcPts val="800"/>
@@ -3450,7 +3449,7 @@
           <a:p>
             <a:pPr algn="l">
               <a:lnSpc>
-                <a:spcPts val="1820"/>
+                <a:spcPct val="125000"/>
               </a:lnSpc>
               <a:spcBef>
                 <a:spcPts val="200"/>
@@ -3472,7 +3471,7 @@
           <a:p>
             <a:pPr algn="l">
               <a:lnSpc>
-                <a:spcPts val="2080"/>
+                <a:spcPct val="125000"/>
               </a:lnSpc>
               <a:spcBef>
                 <a:spcPts val="800"/>
@@ -3494,7 +3493,7 @@
           <a:p>
             <a:pPr algn="l">
               <a:lnSpc>
-                <a:spcPts val="1820"/>
+                <a:spcPct val="125000"/>
               </a:lnSpc>
               <a:spcBef>
                 <a:spcPts val="200"/>

--- a/ppts_output_v3/18_文化事业建设费风险指引.pptx
+++ b/ppts_output_v3/18_文化事业建设费风险指引.pptx
@@ -3301,7 +3301,7 @@
                 <a:spcPts val="0"/>
               </a:spcBef>
               <a:spcAft>
-                <a:spcPts val="600"/>
+                <a:spcPts val="0"/>
               </a:spcAft>
             </a:pPr>
             <a:r>
@@ -3320,10 +3320,10 @@
                 <a:spcPct val="125000"/>
               </a:lnSpc>
               <a:spcBef>
-                <a:spcPts val="800"/>
+                <a:spcPts val="0"/>
               </a:spcBef>
               <a:spcAft>
-                <a:spcPts val="300"/>
+                <a:spcPts val="0"/>
               </a:spcAft>
             </a:pPr>
             <a:r>
@@ -3342,10 +3342,10 @@
                 <a:spcPct val="125000"/>
               </a:lnSpc>
               <a:spcBef>
-                <a:spcPts val="200"/>
+                <a:spcPts val="0"/>
               </a:spcBef>
               <a:spcAft>
-                <a:spcPts val="200"/>
+                <a:spcPts val="0"/>
               </a:spcAft>
             </a:pPr>
             <a:r>
@@ -3364,10 +3364,10 @@
                 <a:spcPct val="125000"/>
               </a:lnSpc>
               <a:spcBef>
-                <a:spcPts val="800"/>
+                <a:spcPts val="0"/>
               </a:spcBef>
               <a:spcAft>
-                <a:spcPts val="300"/>
+                <a:spcPts val="0"/>
               </a:spcAft>
             </a:pPr>
             <a:r>
@@ -3386,10 +3386,10 @@
                 <a:spcPct val="125000"/>
               </a:lnSpc>
               <a:spcBef>
-                <a:spcPts val="200"/>
+                <a:spcPts val="0"/>
               </a:spcBef>
               <a:spcAft>
-                <a:spcPts val="200"/>
+                <a:spcPts val="0"/>
               </a:spcAft>
             </a:pPr>
             <a:r>
@@ -3408,10 +3408,10 @@
                 <a:spcPct val="125000"/>
               </a:lnSpc>
               <a:spcBef>
-                <a:spcPts val="200"/>
+                <a:spcPts val="0"/>
               </a:spcBef>
               <a:spcAft>
-                <a:spcPts val="200"/>
+                <a:spcPts val="0"/>
               </a:spcAft>
             </a:pPr>
             <a:r>
@@ -3430,10 +3430,10 @@
                 <a:spcPct val="125000"/>
               </a:lnSpc>
               <a:spcBef>
-                <a:spcPts val="800"/>
+                <a:spcPts val="0"/>
               </a:spcBef>
               <a:spcAft>
-                <a:spcPts val="300"/>
+                <a:spcPts val="0"/>
               </a:spcAft>
             </a:pPr>
             <a:r>
@@ -3452,10 +3452,10 @@
                 <a:spcPct val="125000"/>
               </a:lnSpc>
               <a:spcBef>
-                <a:spcPts val="200"/>
+                <a:spcPts val="0"/>
               </a:spcBef>
               <a:spcAft>
-                <a:spcPts val="200"/>
+                <a:spcPts val="0"/>
               </a:spcAft>
             </a:pPr>
             <a:r>
@@ -3474,10 +3474,10 @@
                 <a:spcPct val="125000"/>
               </a:lnSpc>
               <a:spcBef>
-                <a:spcPts val="800"/>
+                <a:spcPts val="0"/>
               </a:spcBef>
               <a:spcAft>
-                <a:spcPts val="300"/>
+                <a:spcPts val="0"/>
               </a:spcAft>
             </a:pPr>
             <a:r>
@@ -3496,10 +3496,10 @@
                 <a:spcPct val="125000"/>
               </a:lnSpc>
               <a:spcBef>
-                <a:spcPts val="200"/>
+                <a:spcPts val="0"/>
               </a:spcBef>
               <a:spcAft>
-                <a:spcPts val="200"/>
+                <a:spcPts val="0"/>
               </a:spcAft>
             </a:pPr>
             <a:r>

--- a/ppts_output_v3/18_文化事业建设费风险指引.pptx
+++ b/ppts_output_v3/18_文化事业建设费风险指引.pptx
@@ -3259,7 +3259,7 @@
           <a:bodyPr rtlCol="0" anchor="ctr" wrap="square" lIns="365760"/>
           <a:lstStyle/>
           <a:p>
-            <a:pPr algn="l"/>
+            <a:pPr algn="just"/>
             <a:r>
               <a:rPr sz="1500" b="1">
                 <a:solidFill>
@@ -3293,7 +3293,7 @@
           </a:bodyPr>
           <a:lstStyle/>
           <a:p>
-            <a:pPr algn="l">
+            <a:pPr algn="just">
               <a:lnSpc>
                 <a:spcPct val="125000"/>
               </a:lnSpc>
@@ -3315,7 +3315,7 @@
             </a:r>
           </a:p>
           <a:p>
-            <a:pPr algn="l">
+            <a:pPr algn="just">
               <a:lnSpc>
                 <a:spcPct val="125000"/>
               </a:lnSpc>
@@ -3337,7 +3337,7 @@
             </a:r>
           </a:p>
           <a:p>
-            <a:pPr algn="l">
+            <a:pPr algn="just">
               <a:lnSpc>
                 <a:spcPct val="125000"/>
               </a:lnSpc>
@@ -3359,7 +3359,7 @@
             </a:r>
           </a:p>
           <a:p>
-            <a:pPr algn="l">
+            <a:pPr algn="just">
               <a:lnSpc>
                 <a:spcPct val="125000"/>
               </a:lnSpc>
@@ -3381,7 +3381,7 @@
             </a:r>
           </a:p>
           <a:p>
-            <a:pPr algn="l">
+            <a:pPr algn="just">
               <a:lnSpc>
                 <a:spcPct val="125000"/>
               </a:lnSpc>
@@ -3403,7 +3403,7 @@
             </a:r>
           </a:p>
           <a:p>
-            <a:pPr algn="l">
+            <a:pPr algn="just">
               <a:lnSpc>
                 <a:spcPct val="125000"/>
               </a:lnSpc>
@@ -3425,7 +3425,7 @@
             </a:r>
           </a:p>
           <a:p>
-            <a:pPr algn="l">
+            <a:pPr algn="just">
               <a:lnSpc>
                 <a:spcPct val="125000"/>
               </a:lnSpc>
@@ -3447,7 +3447,7 @@
             </a:r>
           </a:p>
           <a:p>
-            <a:pPr algn="l">
+            <a:pPr algn="just">
               <a:lnSpc>
                 <a:spcPct val="125000"/>
               </a:lnSpc>
@@ -3469,7 +3469,7 @@
             </a:r>
           </a:p>
           <a:p>
-            <a:pPr algn="l">
+            <a:pPr algn="just">
               <a:lnSpc>
                 <a:spcPct val="125000"/>
               </a:lnSpc>
@@ -3491,7 +3491,7 @@
             </a:r>
           </a:p>
           <a:p>
-            <a:pPr algn="l">
+            <a:pPr algn="just">
               <a:lnSpc>
                 <a:spcPct val="125000"/>
               </a:lnSpc>

--- a/ppts_output_v3/18_文化事业建设费风险指引.pptx
+++ b/ppts_output_v3/18_文化事业建设费风险指引.pptx
@@ -3295,7 +3295,7 @@
           <a:p>
             <a:pPr algn="just">
               <a:lnSpc>
-                <a:spcPct val="125000"/>
+                <a:spcPct val="110000"/>
               </a:lnSpc>
               <a:spcBef>
                 <a:spcPts val="0"/>
@@ -3317,7 +3317,7 @@
           <a:p>
             <a:pPr algn="just">
               <a:lnSpc>
-                <a:spcPct val="125000"/>
+                <a:spcPct val="110000"/>
               </a:lnSpc>
               <a:spcBef>
                 <a:spcPts val="0"/>
@@ -3339,7 +3339,7 @@
           <a:p>
             <a:pPr algn="just">
               <a:lnSpc>
-                <a:spcPct val="125000"/>
+                <a:spcPct val="110000"/>
               </a:lnSpc>
               <a:spcBef>
                 <a:spcPts val="0"/>
@@ -3361,7 +3361,7 @@
           <a:p>
             <a:pPr algn="just">
               <a:lnSpc>
-                <a:spcPct val="125000"/>
+                <a:spcPct val="110000"/>
               </a:lnSpc>
               <a:spcBef>
                 <a:spcPts val="0"/>
@@ -3383,7 +3383,7 @@
           <a:p>
             <a:pPr algn="just">
               <a:lnSpc>
-                <a:spcPct val="125000"/>
+                <a:spcPct val="110000"/>
               </a:lnSpc>
               <a:spcBef>
                 <a:spcPts val="0"/>
@@ -3405,7 +3405,7 @@
           <a:p>
             <a:pPr algn="just">
               <a:lnSpc>
-                <a:spcPct val="125000"/>
+                <a:spcPct val="110000"/>
               </a:lnSpc>
               <a:spcBef>
                 <a:spcPts val="0"/>
@@ -3427,7 +3427,7 @@
           <a:p>
             <a:pPr algn="just">
               <a:lnSpc>
-                <a:spcPct val="125000"/>
+                <a:spcPct val="110000"/>
               </a:lnSpc>
               <a:spcBef>
                 <a:spcPts val="0"/>
@@ -3449,7 +3449,7 @@
           <a:p>
             <a:pPr algn="just">
               <a:lnSpc>
-                <a:spcPct val="125000"/>
+                <a:spcPct val="110000"/>
               </a:lnSpc>
               <a:spcBef>
                 <a:spcPts val="0"/>
@@ -3471,7 +3471,7 @@
           <a:p>
             <a:pPr algn="just">
               <a:lnSpc>
-                <a:spcPct val="125000"/>
+                <a:spcPct val="110000"/>
               </a:lnSpc>
               <a:spcBef>
                 <a:spcPts val="0"/>
@@ -3493,7 +3493,7 @@
           <a:p>
             <a:pPr algn="just">
               <a:lnSpc>
-                <a:spcPct val="125000"/>
+                <a:spcPct val="110000"/>
               </a:lnSpc>
               <a:spcBef>
                 <a:spcPts val="0"/>

--- a/ppts_output_v3/18_文化事业建设费风险指引.pptx
+++ b/ppts_output_v3/18_文化事业建设费风险指引.pptx
@@ -3085,7 +3085,7 @@
     <p:bg>
       <p:bgPr>
         <a:solidFill>
-          <a:srgbClr val="1B3A5C"/>
+          <a:srgbClr val="6B2D3B"/>
         </a:solidFill>
         <a:effectLst/>
       </p:bgPr>
@@ -3099,143 +3099,20 @@
       <p:grpSpPr/>
       <p:sp>
         <p:nvSpPr>
-          <p:cNvPr id="2" name="TextBox 1"/>
-          <p:cNvSpPr txBox="1"/>
+          <p:cNvPr id="2" name="Oval 1"/>
+          <p:cNvSpPr/>
           <p:nvPr/>
         </p:nvSpPr>
         <p:spPr>
           <a:xfrm>
-            <a:off x="731520" y="1371600"/>
-            <a:ext cx="10728655" cy="2286000"/>
+            <a:off x="3353104" y="274320"/>
+            <a:ext cx="5486400" cy="5486400"/>
           </a:xfrm>
-          <a:prstGeom prst="rect">
-            <a:avLst/>
-          </a:prstGeom>
-          <a:noFill/>
-        </p:spPr>
-        <p:txBody>
-          <a:bodyPr wrap="square">
-            <a:spAutoFit/>
-          </a:bodyPr>
-          <a:lstStyle/>
-          <a:p>
-            <a:pPr algn="ctr">
-              <a:defRPr sz="4000" b="1">
-                <a:solidFill>
-                  <a:srgbClr val="FFFFFF"/>
-                </a:solidFill>
-              </a:defRPr>
-            </a:pPr>
-            <a:r>
-              <a:t>文化事业建设费风险指引</a:t>
-            </a:r>
-          </a:p>
-        </p:txBody>
-      </p:sp>
-      <p:sp>
-        <p:nvSpPr>
-          <p:cNvPr id="3" name="TextBox 2"/>
-          <p:cNvSpPr txBox="1"/>
-          <p:nvPr/>
-        </p:nvSpPr>
-        <p:spPr>
-          <a:xfrm>
-            <a:off x="731520" y="3840480"/>
-            <a:ext cx="10728655" cy="731520"/>
-          </a:xfrm>
-          <a:prstGeom prst="rect">
-            <a:avLst/>
-          </a:prstGeom>
-          <a:noFill/>
-        </p:spPr>
-        <p:txBody>
-          <a:bodyPr wrap="none">
-            <a:spAutoFit/>
-          </a:bodyPr>
-          <a:lstStyle/>
-          <a:p>
-            <a:pPr algn="ctr">
-              <a:defRPr sz="2200">
-                <a:solidFill>
-                  <a:srgbClr val="AABBCC"/>
-                </a:solidFill>
-              </a:defRPr>
-            </a:pPr>
-            <a:r>
-              <a:t>共 1 个风险点</a:t>
-            </a:r>
-          </a:p>
-        </p:txBody>
-      </p:sp>
-      <p:sp>
-        <p:nvSpPr>
-          <p:cNvPr id="4" name="TextBox 3"/>
-          <p:cNvSpPr txBox="1"/>
-          <p:nvPr/>
-        </p:nvSpPr>
-        <p:spPr>
-          <a:xfrm>
-            <a:off x="731520" y="4572000"/>
-            <a:ext cx="10728655" cy="731520"/>
-          </a:xfrm>
-          <a:prstGeom prst="rect">
-            <a:avLst/>
-          </a:prstGeom>
-          <a:noFill/>
-        </p:spPr>
-        <p:txBody>
-          <a:bodyPr wrap="none">
-            <a:spAutoFit/>
-          </a:bodyPr>
-          <a:lstStyle/>
-          <a:p>
-            <a:pPr algn="ctr">
-              <a:defRPr sz="1600">
-                <a:solidFill>
-                  <a:srgbClr val="8899AA"/>
-                </a:solidFill>
-              </a:defRPr>
-            </a:pPr>
-            <a:r>
-              <a:t>税费合规指引 (2.0版)</a:t>
-            </a:r>
-          </a:p>
-        </p:txBody>
-      </p:sp>
-    </p:spTree>
-  </p:cSld>
-  <p:clrMapOvr>
-    <a:masterClrMapping/>
-  </p:clrMapOvr>
-</p:sld>
-</file>
-
-<file path=ppt/slides/slide2.xml><?xml version="1.0" encoding="utf-8"?>
-<p:sld xmlns:a="http://schemas.openxmlformats.org/drawingml/2006/main" xmlns:p="http://schemas.openxmlformats.org/presentationml/2006/main" xmlns:r="http://schemas.openxmlformats.org/officeDocument/2006/relationships">
-  <p:cSld>
-    <p:spTree>
-      <p:nvGrpSpPr>
-        <p:cNvPr id="1" name=""/>
-        <p:cNvGrpSpPr/>
-        <p:nvPr/>
-      </p:nvGrpSpPr>
-      <p:grpSpPr/>
-      <p:sp>
-        <p:nvSpPr>
-          <p:cNvPr id="2" name="Rectangle 1"/>
-          <p:cNvSpPr/>
-          <p:nvPr/>
-        </p:nvSpPr>
-        <p:spPr>
-          <a:xfrm>
-            <a:off x="0" y="0"/>
-            <a:ext cx="12191695" cy="594360"/>
-          </a:xfrm>
-          <a:prstGeom prst="rect">
+          <a:prstGeom prst="ellipse">
             <a:avLst/>
           </a:prstGeom>
           <a:solidFill>
-            <a:srgbClr val="1B3A5C"/>
+            <a:srgbClr val="A76977"/>
           </a:solidFill>
           <a:ln>
             <a:noFill/>
@@ -3256,6 +3133,215 @@
           </a:fontRef>
         </p:style>
         <p:txBody>
+          <a:bodyPr rtlCol="0" anchor="ctr"/>
+          <a:lstStyle/>
+          <a:p>
+            <a:pPr algn="ctr"/>
+          </a:p>
+        </p:txBody>
+      </p:sp>
+      <p:sp>
+        <p:nvSpPr>
+          <p:cNvPr id="3" name="TextBox 2"/>
+          <p:cNvSpPr txBox="1"/>
+          <p:nvPr/>
+        </p:nvSpPr>
+        <p:spPr>
+          <a:xfrm>
+            <a:off x="731520" y="1645920"/>
+            <a:ext cx="10728655" cy="2286000"/>
+          </a:xfrm>
+          <a:prstGeom prst="rect">
+            <a:avLst/>
+          </a:prstGeom>
+          <a:noFill/>
+        </p:spPr>
+        <p:txBody>
+          <a:bodyPr wrap="square">
+            <a:spAutoFit/>
+          </a:bodyPr>
+          <a:lstStyle/>
+          <a:p>
+            <a:pPr algn="ctr">
+              <a:defRPr sz="4000" b="1">
+                <a:solidFill>
+                  <a:srgbClr val="FFFFFF"/>
+                </a:solidFill>
+              </a:defRPr>
+            </a:pPr>
+            <a:r>
+              <a:t>文化事业建设费风险指引</a:t>
+            </a:r>
+          </a:p>
+        </p:txBody>
+      </p:sp>
+      <p:sp>
+        <p:nvSpPr>
+          <p:cNvPr id="4" name="Rectangle 3"/>
+          <p:cNvSpPr/>
+          <p:nvPr/>
+        </p:nvSpPr>
+        <p:spPr>
+          <a:xfrm>
+            <a:off x="4114800" y="3749039"/>
+            <a:ext cx="3962095" cy="18288"/>
+          </a:xfrm>
+          <a:prstGeom prst="rect">
+            <a:avLst/>
+          </a:prstGeom>
+          <a:solidFill>
+            <a:srgbClr val="FFFFFF"/>
+          </a:solidFill>
+          <a:ln>
+            <a:noFill/>
+          </a:ln>
+        </p:spPr>
+        <p:style>
+          <a:lnRef idx="1">
+            <a:schemeClr val="accent1"/>
+          </a:lnRef>
+          <a:fillRef idx="3">
+            <a:schemeClr val="accent1"/>
+          </a:fillRef>
+          <a:effectRef idx="2">
+            <a:schemeClr val="accent1"/>
+          </a:effectRef>
+          <a:fontRef idx="minor">
+            <a:schemeClr val="lt1"/>
+          </a:fontRef>
+        </p:style>
+        <p:txBody>
+          <a:bodyPr rtlCol="0" anchor="ctr"/>
+          <a:lstStyle/>
+          <a:p>
+            <a:pPr algn="ctr"/>
+          </a:p>
+        </p:txBody>
+      </p:sp>
+      <p:sp>
+        <p:nvSpPr>
+          <p:cNvPr id="5" name="TextBox 4"/>
+          <p:cNvSpPr txBox="1"/>
+          <p:nvPr/>
+        </p:nvSpPr>
+        <p:spPr>
+          <a:xfrm>
+            <a:off x="731520" y="3931920"/>
+            <a:ext cx="10728655" cy="548640"/>
+          </a:xfrm>
+          <a:prstGeom prst="rect">
+            <a:avLst/>
+          </a:prstGeom>
+          <a:noFill/>
+        </p:spPr>
+        <p:txBody>
+          <a:bodyPr wrap="none">
+            <a:spAutoFit/>
+          </a:bodyPr>
+          <a:lstStyle/>
+          <a:p>
+            <a:pPr algn="ctr">
+              <a:defRPr sz="2200">
+                <a:solidFill>
+                  <a:srgbClr val="CCCCCC"/>
+                </a:solidFill>
+              </a:defRPr>
+            </a:pPr>
+            <a:r>
+              <a:t>共 1 个风险点</a:t>
+            </a:r>
+          </a:p>
+        </p:txBody>
+      </p:sp>
+      <p:sp>
+        <p:nvSpPr>
+          <p:cNvPr id="6" name="TextBox 5"/>
+          <p:cNvSpPr txBox="1"/>
+          <p:nvPr/>
+        </p:nvSpPr>
+        <p:spPr>
+          <a:xfrm>
+            <a:off x="731520" y="4572000"/>
+            <a:ext cx="10728655" cy="731520"/>
+          </a:xfrm>
+          <a:prstGeom prst="rect">
+            <a:avLst/>
+          </a:prstGeom>
+          <a:noFill/>
+        </p:spPr>
+        <p:txBody>
+          <a:bodyPr wrap="none">
+            <a:spAutoFit/>
+          </a:bodyPr>
+          <a:lstStyle/>
+          <a:p>
+            <a:pPr algn="ctr">
+              <a:defRPr sz="1600">
+                <a:solidFill>
+                  <a:srgbClr val="AABBCC"/>
+                </a:solidFill>
+              </a:defRPr>
+            </a:pPr>
+            <a:r>
+              <a:t>税费合规指引 (2.0版)</a:t>
+            </a:r>
+          </a:p>
+        </p:txBody>
+      </p:sp>
+    </p:spTree>
+  </p:cSld>
+  <p:clrMapOvr>
+    <a:masterClrMapping/>
+  </p:clrMapOvr>
+</p:sld>
+</file>
+
+<file path=ppt/slides/slide2.xml><?xml version="1.0" encoding="utf-8"?>
+<p:sld xmlns:a="http://schemas.openxmlformats.org/drawingml/2006/main" xmlns:p="http://schemas.openxmlformats.org/presentationml/2006/main" xmlns:r="http://schemas.openxmlformats.org/officeDocument/2006/relationships">
+  <p:cSld>
+    <p:spTree>
+      <p:nvGrpSpPr>
+        <p:cNvPr id="1" name=""/>
+        <p:cNvGrpSpPr/>
+        <p:nvPr/>
+      </p:nvGrpSpPr>
+      <p:grpSpPr/>
+      <p:sp>
+        <p:nvSpPr>
+          <p:cNvPr id="2" name="Rectangle 1"/>
+          <p:cNvSpPr/>
+          <p:nvPr/>
+        </p:nvSpPr>
+        <p:spPr>
+          <a:xfrm>
+            <a:off x="0" y="0"/>
+            <a:ext cx="12191695" cy="594360"/>
+          </a:xfrm>
+          <a:prstGeom prst="rect">
+            <a:avLst/>
+          </a:prstGeom>
+          <a:solidFill>
+            <a:srgbClr val="6B2D3B"/>
+          </a:solidFill>
+          <a:ln>
+            <a:noFill/>
+          </a:ln>
+        </p:spPr>
+        <p:style>
+          <a:lnRef idx="1">
+            <a:schemeClr val="accent1"/>
+          </a:lnRef>
+          <a:fillRef idx="3">
+            <a:schemeClr val="accent1"/>
+          </a:fillRef>
+          <a:effectRef idx="2">
+            <a:schemeClr val="accent1"/>
+          </a:effectRef>
+          <a:fontRef idx="minor">
+            <a:schemeClr val="lt1"/>
+          </a:fontRef>
+        </p:style>
+        <p:txBody>
           <a:bodyPr rtlCol="0" anchor="ctr" wrap="square" lIns="365760"/>
           <a:lstStyle/>
           <a:p>
@@ -3307,7 +3393,7 @@
             <a:r>
               <a:rPr sz="1600" b="1">
                 <a:solidFill>
-                  <a:srgbClr val="1B3A5C"/>
+                  <a:srgbClr val="6B2D3B"/>
                 </a:solidFill>
                 <a:latin typeface="Microsoft YaHei"/>
               </a:rPr>
@@ -3511,6 +3597,49 @@
               </a:rPr>
               <a:t>企业核查开具广告服务业发票时，是否同时缴纳了文化事业建设费。</a:t>
             </a:r>
+          </a:p>
+        </p:txBody>
+      </p:sp>
+      <p:sp>
+        <p:nvSpPr>
+          <p:cNvPr id="4" name="Rectangle 3"/>
+          <p:cNvSpPr/>
+          <p:nvPr/>
+        </p:nvSpPr>
+        <p:spPr>
+          <a:xfrm>
+            <a:off x="457200" y="6720840"/>
+            <a:ext cx="11277295" cy="27432"/>
+          </a:xfrm>
+          <a:prstGeom prst="rect">
+            <a:avLst/>
+          </a:prstGeom>
+          <a:solidFill>
+            <a:srgbClr val="6B2D3B"/>
+          </a:solidFill>
+          <a:ln>
+            <a:noFill/>
+          </a:ln>
+        </p:spPr>
+        <p:style>
+          <a:lnRef idx="1">
+            <a:schemeClr val="accent1"/>
+          </a:lnRef>
+          <a:fillRef idx="3">
+            <a:schemeClr val="accent1"/>
+          </a:fillRef>
+          <a:effectRef idx="2">
+            <a:schemeClr val="accent1"/>
+          </a:effectRef>
+          <a:fontRef idx="minor">
+            <a:schemeClr val="lt1"/>
+          </a:fontRef>
+        </p:style>
+        <p:txBody>
+          <a:bodyPr rtlCol="0" anchor="ctr"/>
+          <a:lstStyle/>
+          <a:p>
+            <a:pPr algn="ctr"/>
           </a:p>
         </p:txBody>
       </p:sp>

--- a/ppts_output_v3/18_文化事业建设费风险指引.pptx
+++ b/ppts_output_v3/18_文化事业建设费风险指引.pptx
@@ -3167,6 +3167,7 @@
                 <a:solidFill>
                   <a:srgbClr val="FFFFFF"/>
                 </a:solidFill>
+                <a:latin typeface="Microsoft YaHei"/>
               </a:defRPr>
             </a:pPr>
             <a:r>
@@ -3245,6 +3246,7 @@
                 <a:solidFill>
                   <a:srgbClr val="CCCCCC"/>
                 </a:solidFill>
+                <a:latin typeface="Microsoft YaHei"/>
               </a:defRPr>
             </a:pPr>
             <a:r>
@@ -3280,6 +3282,7 @@
                 <a:solidFill>
                   <a:srgbClr val="AABBCC"/>
                 </a:solidFill>
+                <a:latin typeface="Microsoft YaHei"/>
               </a:defRPr>
             </a:pPr>
             <a:r>
@@ -3351,6 +3354,7 @@
                 <a:solidFill>
                   <a:srgbClr val="FFFFFF"/>
                 </a:solidFill>
+                <a:latin typeface="Microsoft YaHei"/>
               </a:rPr>
               <a:t>文化事业建设费风险指引  |  风险点 1</a:t>
             </a:r>
